--- a/docs/验收汇报ppt/汇编验收.pptx
+++ b/docs/验收汇报ppt/汇编验收.pptx
@@ -2668,7 +2668,7 @@
         </p:nvSpPr>
         <p:spPr>
           <a:xfrm>
-            <a:off x="590550" y="4305300"/>
+            <a:off x="590550" y="2867025"/>
             <a:ext cx="2476500" cy="361950"/>
           </a:xfrm>
           <a:prstGeom prst="rect">
@@ -2706,27 +2706,35 @@
               </a:rPr>
               <a:t>验收汇报</a:t>
             </a:r>
+            <a:endParaRPr sz="1500" b="1" dirty="0">
+              <a:solidFill>
+                <a:srgbClr val="25D4E8"/>
+              </a:solidFill>
+              <a:latin typeface="Noto Sans SC"/>
+              <a:ea typeface="Noto Sans SC"/>
+              <a:cs typeface="Noto Sans SC"/>
+            </a:endParaRPr>
           </a:p>
         </p:txBody>
       </p:sp>
       <p:sp>
         <p:nvSpPr>
-          <p:cNvPr id="5" name="矩形 4">
-            <a:extLst>
-              <a:ext uri="{FF2B5EF4-FFF2-40B4-BE49-F238E27FC236}">
-                <a16:creationId xmlns:a16="http://schemas.microsoft.com/office/drawing/2014/main" id="{DDB736FC-AB2D-41DC-89C7-D1CE32D81295}"/>
-              </a:ext>
-            </a:extLst>
-          </p:cNvPr>
-          <p:cNvSpPr>
-            <a:spLocks noGrp="1"/>
-          </p:cNvSpPr>
-          <p:nvPr/>
-        </p:nvSpPr>
-        <p:spPr>
-          <a:xfrm>
-            <a:off x="590550" y="4857750"/>
-            <a:ext cx="8858250" cy="400050"/>
+          <p:cNvPr id="12" name="矩形 11">
+            <a:extLst>
+              <a:ext uri="{FF2B5EF4-FFF2-40B4-BE49-F238E27FC236}">
+                <a16:creationId xmlns:a16="http://schemas.microsoft.com/office/drawing/2014/main" id="{18F4131C-F10F-47DB-BBD7-982B9DE66AB7}"/>
+              </a:ext>
+            </a:extLst>
+          </p:cNvPr>
+          <p:cNvSpPr>
+            <a:spLocks noGrp="1"/>
+          </p:cNvSpPr>
+          <p:nvPr/>
+        </p:nvSpPr>
+        <p:spPr>
+          <a:xfrm>
+            <a:off x="590550" y="4210050"/>
+            <a:ext cx="8096250" cy="228600"/>
           </a:xfrm>
           <a:prstGeom prst="rect">
             <a:avLst/>
@@ -2738,338 +2746,11 @@
         </p:spPr>
         <p:txBody>
           <a:bodyPr anchor="t">
-            <a:normAutofit/>
+            <a:noAutofit/>
           </a:bodyPr>
           <a:lstStyle/>
           <a:p>
             <a:pPr>
-              <a:defRPr sz="1650" b="0">
-                <a:solidFill>
-                  <a:srgbClr val="EAF2FF"/>
-                </a:solidFill>
-                <a:latin typeface="Noto Sans SC"/>
-                <a:ea typeface="Noto Sans SC"/>
-                <a:cs typeface="Noto Sans SC"/>
-              </a:defRPr>
-            </a:pPr>
-            <a:r>
-              <a:rPr sz="1650" b="0">
-                <a:solidFill>
-                  <a:srgbClr val="EAF2FF"/>
-                </a:solidFill>
-                <a:latin typeface="Noto Sans SC"/>
-                <a:ea typeface="Noto Sans SC"/>
-                <a:cs typeface="Noto Sans SC"/>
-              </a:rPr>
-              <a:t>ST7571 初始化、MMIO 驱动、俄罗斯方块与实板交互</a:t>
-            </a:r>
-          </a:p>
-        </p:txBody>
-      </p:sp>
-      <p:sp>
-        <p:nvSpPr>
-          <p:cNvPr id="6" name="矩形: 圆角 5">
-            <a:extLst>
-              <a:ext uri="{FF2B5EF4-FFF2-40B4-BE49-F238E27FC236}">
-                <a16:creationId xmlns:a16="http://schemas.microsoft.com/office/drawing/2014/main" id="{98B83389-0104-4308-A921-A218EC68849A}"/>
-              </a:ext>
-            </a:extLst>
-          </p:cNvPr>
-          <p:cNvSpPr>
-            <a:spLocks noGrp="1"/>
-          </p:cNvSpPr>
-          <p:nvPr/>
-        </p:nvSpPr>
-        <p:spPr>
-          <a:xfrm>
-            <a:off x="590550" y="5657850"/>
-            <a:ext cx="1238250" cy="304800"/>
-          </a:xfrm>
-          <a:prstGeom prst="roundRect">
-            <a:avLst>
-              <a:gd name="adj" fmla="val 50000"/>
-            </a:avLst>
-          </a:prstGeom>
-          <a:solidFill>
-            <a:srgbClr val="16243B"/>
-          </a:solidFill>
-          <a:ln w="0">
-            <a:noFill/>
-            <a:prstDash val="solid"/>
-          </a:ln>
-        </p:spPr>
-      </p:sp>
-      <p:sp>
-        <p:nvSpPr>
-          <p:cNvPr id="7" name="矩形 6">
-            <a:extLst>
-              <a:ext uri="{FF2B5EF4-FFF2-40B4-BE49-F238E27FC236}">
-                <a16:creationId xmlns:a16="http://schemas.microsoft.com/office/drawing/2014/main" id="{B35165EC-FD49-4048-8000-5BD8834671DF}"/>
-              </a:ext>
-            </a:extLst>
-          </p:cNvPr>
-          <p:cNvSpPr>
-            <a:spLocks noGrp="1"/>
-          </p:cNvSpPr>
-          <p:nvPr/>
-        </p:nvSpPr>
-        <p:spPr>
-          <a:xfrm>
-            <a:off x="590550" y="5705475"/>
-            <a:ext cx="1238250" cy="200025"/>
-          </a:xfrm>
-          <a:prstGeom prst="rect">
-            <a:avLst/>
-          </a:prstGeom>
-          <a:noFill/>
-          <a:ln w="0">
-            <a:noFill/>
-          </a:ln>
-        </p:spPr>
-        <p:txBody>
-          <a:bodyPr anchor="ctr">
-            <a:normAutofit fontScale="80577" lnSpcReduction="20000"/>
-          </a:bodyPr>
-          <a:lstStyle/>
-          <a:p>
-            <a:pPr>
-              <a:defRPr sz="975" b="1">
-                <a:solidFill>
-                  <a:srgbClr val="A78BFA"/>
-                </a:solidFill>
-                <a:latin typeface="Noto Sans SC"/>
-                <a:ea typeface="Noto Sans SC"/>
-                <a:cs typeface="Noto Sans SC"/>
-              </a:defRPr>
-            </a:pPr>
-            <a:r>
-              <a:rPr sz="975" b="1">
-                <a:solidFill>
-                  <a:srgbClr val="A78BFA"/>
-                </a:solidFill>
-                <a:latin typeface="Noto Sans SC"/>
-                <a:ea typeface="Noto Sans SC"/>
-                <a:cs typeface="Noto Sans SC"/>
-              </a:rPr>
-              <a:t>IP v1.0</a:t>
-            </a:r>
-          </a:p>
-        </p:txBody>
-      </p:sp>
-      <p:sp>
-        <p:nvSpPr>
-          <p:cNvPr id="8" name="矩形: 圆角 7">
-            <a:extLst>
-              <a:ext uri="{FF2B5EF4-FFF2-40B4-BE49-F238E27FC236}">
-                <a16:creationId xmlns:a16="http://schemas.microsoft.com/office/drawing/2014/main" id="{941949D5-E755-4892-9B96-C5FCC17E93F3}"/>
-              </a:ext>
-            </a:extLst>
-          </p:cNvPr>
-          <p:cNvSpPr>
-            <a:spLocks noGrp="1"/>
-          </p:cNvSpPr>
-          <p:nvPr/>
-        </p:nvSpPr>
-        <p:spPr>
-          <a:xfrm>
-            <a:off x="1981200" y="5657850"/>
-            <a:ext cx="1428750" cy="304800"/>
-          </a:xfrm>
-          <a:prstGeom prst="roundRect">
-            <a:avLst>
-              <a:gd name="adj" fmla="val 50000"/>
-            </a:avLst>
-          </a:prstGeom>
-          <a:solidFill>
-            <a:srgbClr val="16243B"/>
-          </a:solidFill>
-          <a:ln w="0">
-            <a:noFill/>
-            <a:prstDash val="solid"/>
-          </a:ln>
-        </p:spPr>
-      </p:sp>
-      <p:sp>
-        <p:nvSpPr>
-          <p:cNvPr id="9" name="矩形 8">
-            <a:extLst>
-              <a:ext uri="{FF2B5EF4-FFF2-40B4-BE49-F238E27FC236}">
-                <a16:creationId xmlns:a16="http://schemas.microsoft.com/office/drawing/2014/main" id="{4E4CF627-F4CB-4E84-B009-85EA47FD5550}"/>
-              </a:ext>
-            </a:extLst>
-          </p:cNvPr>
-          <p:cNvSpPr>
-            <a:spLocks noGrp="1"/>
-          </p:cNvSpPr>
-          <p:nvPr/>
-        </p:nvSpPr>
-        <p:spPr>
-          <a:xfrm>
-            <a:off x="1981200" y="5705475"/>
-            <a:ext cx="1428750" cy="200025"/>
-          </a:xfrm>
-          <a:prstGeom prst="rect">
-            <a:avLst/>
-          </a:prstGeom>
-          <a:noFill/>
-          <a:ln w="0">
-            <a:noFill/>
-          </a:ln>
-        </p:spPr>
-        <p:txBody>
-          <a:bodyPr anchor="ctr">
-            <a:normAutofit fontScale="80577" lnSpcReduction="20000"/>
-          </a:bodyPr>
-          <a:lstStyle/>
-          <a:p>
-            <a:pPr>
-              <a:defRPr sz="975" b="1">
-                <a:solidFill>
-                  <a:srgbClr val="37D99A"/>
-                </a:solidFill>
-                <a:latin typeface="Noto Sans SC"/>
-                <a:ea typeface="Noto Sans SC"/>
-                <a:cs typeface="Noto Sans SC"/>
-              </a:defRPr>
-            </a:pPr>
-            <a:r>
-              <a:rPr sz="975" b="1">
-                <a:solidFill>
-                  <a:srgbClr val="37D99A"/>
-                </a:solidFill>
-                <a:latin typeface="Noto Sans SC"/>
-                <a:ea typeface="Noto Sans SC"/>
-                <a:cs typeface="Noto Sans SC"/>
-              </a:rPr>
-              <a:t>10×20 棋盘</a:t>
-            </a:r>
-          </a:p>
-        </p:txBody>
-      </p:sp>
-      <p:sp>
-        <p:nvSpPr>
-          <p:cNvPr id="10" name="矩形: 圆角 9">
-            <a:extLst>
-              <a:ext uri="{FF2B5EF4-FFF2-40B4-BE49-F238E27FC236}">
-                <a16:creationId xmlns:a16="http://schemas.microsoft.com/office/drawing/2014/main" id="{10CEFDAE-8E39-4495-8EAD-4E9EB8742169}"/>
-              </a:ext>
-            </a:extLst>
-          </p:cNvPr>
-          <p:cNvSpPr>
-            <a:spLocks noGrp="1"/>
-          </p:cNvSpPr>
-          <p:nvPr/>
-        </p:nvSpPr>
-        <p:spPr>
-          <a:xfrm>
-            <a:off x="3562350" y="5657850"/>
-            <a:ext cx="1524000" cy="304800"/>
-          </a:xfrm>
-          <a:prstGeom prst="roundRect">
-            <a:avLst>
-              <a:gd name="adj" fmla="val 50000"/>
-            </a:avLst>
-          </a:prstGeom>
-          <a:solidFill>
-            <a:srgbClr val="16243B"/>
-          </a:solidFill>
-          <a:ln w="0">
-            <a:noFill/>
-            <a:prstDash val="solid"/>
-          </a:ln>
-        </p:spPr>
-      </p:sp>
-      <p:sp>
-        <p:nvSpPr>
-          <p:cNvPr id="11" name="矩形 10">
-            <a:extLst>
-              <a:ext uri="{FF2B5EF4-FFF2-40B4-BE49-F238E27FC236}">
-                <a16:creationId xmlns:a16="http://schemas.microsoft.com/office/drawing/2014/main" id="{67110B24-3DE6-478C-9E7B-94654D3612AD}"/>
-              </a:ext>
-            </a:extLst>
-          </p:cNvPr>
-          <p:cNvSpPr>
-            <a:spLocks noGrp="1"/>
-          </p:cNvSpPr>
-          <p:nvPr/>
-        </p:nvSpPr>
-        <p:spPr>
-          <a:xfrm>
-            <a:off x="3562350" y="5705475"/>
-            <a:ext cx="1524000" cy="200025"/>
-          </a:xfrm>
-          <a:prstGeom prst="rect">
-            <a:avLst/>
-          </a:prstGeom>
-          <a:noFill/>
-          <a:ln w="0">
-            <a:noFill/>
-          </a:ln>
-        </p:spPr>
-        <p:txBody>
-          <a:bodyPr anchor="ctr">
-            <a:normAutofit fontScale="80577" lnSpcReduction="20000"/>
-          </a:bodyPr>
-          <a:lstStyle/>
-          <a:p>
-            <a:pPr>
-              <a:defRPr sz="975" b="1">
-                <a:solidFill>
-                  <a:srgbClr val="F5B942"/>
-                </a:solidFill>
-                <a:latin typeface="Noto Sans SC"/>
-                <a:ea typeface="Noto Sans SC"/>
-                <a:cs typeface="Noto Sans SC"/>
-              </a:defRPr>
-            </a:pPr>
-            <a:r>
-              <a:rPr sz="975" b="1">
-                <a:solidFill>
-                  <a:srgbClr val="F5B942"/>
-                </a:solidFill>
-                <a:latin typeface="Noto Sans SC"/>
-                <a:ea typeface="Noto Sans SC"/>
-                <a:cs typeface="Noto Sans SC"/>
-              </a:rPr>
-              <a:t>SPI + MMIO</a:t>
-            </a:r>
-          </a:p>
-        </p:txBody>
-      </p:sp>
-      <p:sp>
-        <p:nvSpPr>
-          <p:cNvPr id="12" name="矩形 11">
-            <a:extLst>
-              <a:ext uri="{FF2B5EF4-FFF2-40B4-BE49-F238E27FC236}">
-                <a16:creationId xmlns:a16="http://schemas.microsoft.com/office/drawing/2014/main" id="{18F4131C-F10F-47DB-BBD7-982B9DE66AB7}"/>
-              </a:ext>
-            </a:extLst>
-          </p:cNvPr>
-          <p:cNvSpPr>
-            <a:spLocks noGrp="1"/>
-          </p:cNvSpPr>
-          <p:nvPr/>
-        </p:nvSpPr>
-        <p:spPr>
-          <a:xfrm>
-            <a:off x="590550" y="6172200"/>
-            <a:ext cx="8096250" cy="228600"/>
-          </a:xfrm>
-          <a:prstGeom prst="rect">
-            <a:avLst/>
-          </a:prstGeom>
-          <a:noFill/>
-          <a:ln w="0">
-            <a:noFill/>
-          </a:ln>
-        </p:spPr>
-        <p:txBody>
-          <a:bodyPr anchor="t">
-            <a:normAutofit fontScale="93214" lnSpcReduction="10000"/>
-          </a:bodyPr>
-          <a:lstStyle/>
-          <a:p>
-            <a:pPr>
               <a:defRPr sz="1050" b="0">
                 <a:solidFill>
                   <a:srgbClr val="A6B4C8"/>
@@ -3080,7 +2761,7 @@
               </a:defRPr>
             </a:pPr>
             <a:r>
-              <a:rPr sz="1050" b="0">
+              <a:rPr sz="2000" b="0" dirty="0" err="1">
                 <a:solidFill>
                   <a:srgbClr val="A6B4C8"/>
                 </a:solidFill>
@@ -3088,8 +2769,16 @@
                 <a:ea typeface="Noto Sans SC"/>
                 <a:cs typeface="Noto Sans SC"/>
               </a:rPr>
-              <a:t>成员：王建乐、张晓行、钱博傲    日期：2026 年 9 月</a:t>
-            </a:r>
+              <a:t>成员：王建乐、张晓行、钱博傲</a:t>
+            </a:r>
+            <a:endParaRPr sz="2000" b="0" dirty="0">
+              <a:solidFill>
+                <a:srgbClr val="A6B4C8"/>
+              </a:solidFill>
+              <a:latin typeface="Noto Sans SC"/>
+              <a:ea typeface="Noto Sans SC"/>
+              <a:cs typeface="Noto Sans SC"/>
+            </a:endParaRPr>
           </a:p>
         </p:txBody>
       </p:sp>
@@ -6343,7 +6032,7 @@
         </p:nvGraphicFramePr>
         <p:xfrm>
           <a:off x="400050" y="1581150"/>
-          <a:ext cx="11391900" cy="3714750"/>
+          <a:ext cx="11391900" cy="3714753"/>
         </p:xfrm>
         <a:graphic>
           <a:graphicData uri="http://schemas.openxmlformats.org/drawingml/2006/table">
@@ -8925,63 +8614,6 @@
       </p:sp>
       <p:sp>
         <p:nvSpPr>
-          <p:cNvPr id="35" name="矩形 34">
-            <a:extLst>
-              <a:ext uri="{FF2B5EF4-FFF2-40B4-BE49-F238E27FC236}">
-                <a16:creationId xmlns:a16="http://schemas.microsoft.com/office/drawing/2014/main" id="{BCCFF0E2-D994-44E0-888F-0265FB154AEF}"/>
-              </a:ext>
-            </a:extLst>
-          </p:cNvPr>
-          <p:cNvSpPr>
-            <a:spLocks noGrp="1"/>
-          </p:cNvSpPr>
-          <p:nvPr/>
-        </p:nvSpPr>
-        <p:spPr>
-          <a:xfrm>
-            <a:off x="400050" y="5286375"/>
-            <a:ext cx="11391900" cy="342900"/>
-          </a:xfrm>
-          <a:prstGeom prst="rect">
-            <a:avLst/>
-          </a:prstGeom>
-          <a:noFill/>
-          <a:ln w="0">
-            <a:noFill/>
-          </a:ln>
-        </p:spPr>
-        <p:txBody>
-          <a:bodyPr anchor="t">
-            <a:normAutofit/>
-          </a:bodyPr>
-          <a:lstStyle/>
-          <a:p>
-            <a:pPr>
-              <a:defRPr sz="1275" b="1">
-                <a:solidFill>
-                  <a:srgbClr val="F5B942"/>
-                </a:solidFill>
-                <a:latin typeface="Noto Sans SC"/>
-                <a:ea typeface="Noto Sans SC"/>
-                <a:cs typeface="Noto Sans SC"/>
-              </a:defRPr>
-            </a:pPr>
-            <a:r>
-              <a:rPr sz="1275" b="1">
-                <a:solidFill>
-                  <a:srgbClr val="F5B942"/>
-                </a:solidFill>
-                <a:latin typeface="Noto Sans SC"/>
-                <a:ea typeface="Noto Sans SC"/>
-                <a:cs typeface="Noto Sans SC"/>
-              </a:rPr>
-              <a:t>答辩前补入：游戏画面、按键操作、消行帧与蜂鸣器视频截图；总视频不超过 5 分钟</a:t>
-            </a:r>
-          </a:p>
-        </p:txBody>
-      </p:sp>
-      <p:sp>
-        <p:nvSpPr>
           <p:cNvPr id="36" name="矩形 35">
             <a:extLst>
               <a:ext uri="{FF2B5EF4-FFF2-40B4-BE49-F238E27FC236}">
@@ -10150,7 +9782,7 @@
               </a:defRPr>
             </a:pPr>
             <a:r>
-              <a:rPr sz="1275" b="1">
+              <a:rPr sz="1275" b="1" dirty="0" err="1">
                 <a:solidFill>
                   <a:srgbClr val="F26B7A"/>
                 </a:solidFill>
@@ -10158,7 +9790,62 @@
                 <a:ea typeface="Noto Sans SC"/>
                 <a:cs typeface="Noto Sans SC"/>
               </a:rPr>
-              <a:t>提交前仍需补齐 IP 工具截图、最终游戏实物照片和不超过 5 分钟的下板视频。</a:t>
+              <a:t>提交前仍需补齐</a:t>
+            </a:r>
+            <a:r>
+              <a:rPr sz="1275" b="1" dirty="0">
+                <a:solidFill>
+                  <a:srgbClr val="F26B7A"/>
+                </a:solidFill>
+                <a:latin typeface="Noto Sans SC"/>
+                <a:ea typeface="Noto Sans SC"/>
+                <a:cs typeface="Noto Sans SC"/>
+              </a:rPr>
+              <a:t> IP </a:t>
+            </a:r>
+            <a:r>
+              <a:rPr sz="1275" b="1" dirty="0" err="1">
+                <a:solidFill>
+                  <a:srgbClr val="F26B7A"/>
+                </a:solidFill>
+                <a:latin typeface="Noto Sans SC"/>
+                <a:ea typeface="Noto Sans SC"/>
+                <a:cs typeface="Noto Sans SC"/>
+              </a:rPr>
+              <a:t>工具截图、最终游戏实物照片和不超过</a:t>
+            </a:r>
+            <a:r>
+              <a:rPr sz="1275" b="1" dirty="0">
+                <a:solidFill>
+                  <a:srgbClr val="F26B7A"/>
+                </a:solidFill>
+                <a:latin typeface="Noto Sans SC"/>
+                <a:ea typeface="Noto Sans SC"/>
+                <a:cs typeface="Noto Sans SC"/>
+              </a:rPr>
+              <a:t> 5 </a:t>
+            </a:r>
+            <a:r>
+              <a:rPr sz="1275" b="1" dirty="0" err="1">
+                <a:solidFill>
+                  <a:srgbClr val="F26B7A"/>
+                </a:solidFill>
+                <a:latin typeface="Noto Sans SC"/>
+                <a:ea typeface="Noto Sans SC"/>
+                <a:cs typeface="Noto Sans SC"/>
+              </a:rPr>
+              <a:t>分钟的下板视频</a:t>
+            </a:r>
+            <a:r>
+              <a:rPr sz="1275" b="1" dirty="0">
+                <a:solidFill>
+                  <a:srgbClr val="F26B7A"/>
+                </a:solidFill>
+                <a:latin typeface="Noto Sans SC"/>
+                <a:ea typeface="Noto Sans SC"/>
+                <a:cs typeface="Noto Sans SC"/>
+              </a:rPr>
+              <a:t>。</a:t>
             </a:r>
           </a:p>
         </p:txBody>
@@ -11588,63 +11275,6 @@
           </a:prstGeom>
         </p:spPr>
       </p:pic>
-      <p:sp>
-        <p:nvSpPr>
-          <p:cNvPr id="6" name="矩形 5">
-            <a:extLst>
-              <a:ext uri="{FF2B5EF4-FFF2-40B4-BE49-F238E27FC236}">
-                <a16:creationId xmlns:a16="http://schemas.microsoft.com/office/drawing/2014/main" id="{BB37CEA3-3576-495B-9F91-6C4A2918A34A}"/>
-              </a:ext>
-            </a:extLst>
-          </p:cNvPr>
-          <p:cNvSpPr>
-            <a:spLocks noGrp="1"/>
-          </p:cNvSpPr>
-          <p:nvPr/>
-        </p:nvSpPr>
-        <p:spPr>
-          <a:xfrm>
-            <a:off x="400050" y="5867400"/>
-            <a:ext cx="11391900" cy="285750"/>
-          </a:xfrm>
-          <a:prstGeom prst="rect">
-            <a:avLst/>
-          </a:prstGeom>
-          <a:noFill/>
-          <a:ln w="0">
-            <a:noFill/>
-          </a:ln>
-        </p:spPr>
-        <p:txBody>
-          <a:bodyPr anchor="t">
-            <a:normAutofit/>
-          </a:bodyPr>
-          <a:lstStyle/>
-          <a:p>
-            <a:pPr>
-              <a:defRPr sz="1275" b="1">
-                <a:solidFill>
-                  <a:srgbClr val="25D4E8"/>
-                </a:solidFill>
-                <a:latin typeface="Noto Sans SC"/>
-                <a:ea typeface="Noto Sans SC"/>
-                <a:cs typeface="Noto Sans SC"/>
-              </a:defRPr>
-            </a:pPr>
-            <a:r>
-              <a:rPr sz="1275" b="1">
-                <a:solidFill>
-                  <a:srgbClr val="25D4E8"/>
-                </a:solidFill>
-                <a:latin typeface="Noto Sans SC"/>
-                <a:ea typeface="Noto Sans SC"/>
-                <a:cs typeface="Noto Sans SC"/>
-              </a:rPr>
-              <a:t>课程评价对象：LCD 接口控制器 IP、汇编驱动与软硬件协同</a:t>
-            </a:r>
-          </a:p>
-        </p:txBody>
-      </p:sp>
       <p:sp>
         <p:nvSpPr>
           <p:cNvPr id="7" name="矩形 6">
@@ -14566,7 +14196,7 @@
               </a:defRPr>
             </a:pPr>
             <a:r>
-              <a:rPr sz="1350" b="1">
+              <a:rPr sz="1350" b="1" dirty="0" err="1">
                 <a:solidFill>
                   <a:srgbClr val="F5B942"/>
                 </a:solidFill>
@@ -14576,6 +14206,14 @@
               </a:rPr>
               <a:t>答辩前补图</a:t>
             </a:r>
+            <a:endParaRPr sz="1350" b="1" dirty="0">
+              <a:solidFill>
+                <a:srgbClr val="F5B942"/>
+              </a:solidFill>
+              <a:latin typeface="Noto Sans SC"/>
+              <a:ea typeface="Noto Sans SC"/>
+              <a:cs typeface="Noto Sans SC"/>
+            </a:endParaRPr>
           </a:p>
         </p:txBody>
       </p:sp>
